--- a/presentations/kapitola_01_od_otazky_k_datum.pptx
+++ b/presentations/kapitola_01_od_otazky_k_datum.pptx
@@ -6814,7 +6814,7 @@
             </a:pPr>
             <a:r>
               <a:rPr lang="cs-CZ" altLang="cs-CZ" noProof="0" dirty="0"/>
-              <a:t>Synonyma: prediktor, explanační proměnná.</a:t>
+              <a:t>Synonyma: prediktor, vysvětlující proměnná.</a:t>
             </a:r>
           </a:p>
           <a:p>
